--- a/Presentation.pptx
+++ b/Presentation.pptx
@@ -978,7 +978,7 @@
   <p:cSld>
     <p:spTree>
       <p:nvGrpSpPr>
-        <p:cNvPr id="219" name="Shape 219"/>
+        <p:cNvPr id="217" name="Shape 217"/>
         <p:cNvGrpSpPr/>
         <p:nvPr/>
       </p:nvGrpSpPr>
@@ -992,7 +992,7 @@
       </p:grpSpPr>
       <p:sp>
         <p:nvSpPr>
-          <p:cNvPr id="220" name="Google Shape;220;p10:notes"/>
+          <p:cNvPr id="218" name="Google Shape;218;p10:notes"/>
           <p:cNvSpPr txBox="1"/>
           <p:nvPr>
             <p:ph idx="1" type="body"/>
@@ -1039,7 +1039,7 @@
       </p:sp>
       <p:sp>
         <p:nvSpPr>
-          <p:cNvPr id="221" name="Google Shape;221;p10:notes"/>
+          <p:cNvPr id="219" name="Google Shape;219;p10:notes"/>
           <p:cNvSpPr/>
           <p:nvPr>
             <p:ph idx="2" type="sldImg"/>
@@ -1095,7 +1095,7 @@
   <p:cSld>
     <p:spTree>
       <p:nvGrpSpPr>
-        <p:cNvPr id="234" name="Shape 234"/>
+        <p:cNvPr id="232" name="Shape 232"/>
         <p:cNvGrpSpPr/>
         <p:nvPr/>
       </p:nvGrpSpPr>
@@ -1109,7 +1109,7 @@
       </p:grpSpPr>
       <p:sp>
         <p:nvSpPr>
-          <p:cNvPr id="235" name="Google Shape;235;p11:notes"/>
+          <p:cNvPr id="233" name="Google Shape;233;p11:notes"/>
           <p:cNvSpPr txBox="1"/>
           <p:nvPr>
             <p:ph idx="1" type="body"/>
@@ -1156,7 +1156,7 @@
       </p:sp>
       <p:sp>
         <p:nvSpPr>
-          <p:cNvPr id="236" name="Google Shape;236;p11:notes"/>
+          <p:cNvPr id="234" name="Google Shape;234;p11:notes"/>
           <p:cNvSpPr/>
           <p:nvPr>
             <p:ph idx="2" type="sldImg"/>
@@ -1212,7 +1212,7 @@
   <p:cSld>
     <p:spTree>
       <p:nvGrpSpPr>
-        <p:cNvPr id="245" name="Shape 245"/>
+        <p:cNvPr id="243" name="Shape 243"/>
         <p:cNvGrpSpPr/>
         <p:nvPr/>
       </p:nvGrpSpPr>
@@ -1226,7 +1226,7 @@
       </p:grpSpPr>
       <p:sp>
         <p:nvSpPr>
-          <p:cNvPr id="246" name="Google Shape;246;g3f55a0656d9_0_9:notes"/>
+          <p:cNvPr id="244" name="Google Shape;244;g3f55a0656d9_0_9:notes"/>
           <p:cNvSpPr txBox="1"/>
           <p:nvPr>
             <p:ph idx="1" type="body"/>
@@ -1273,7 +1273,7 @@
       </p:sp>
       <p:sp>
         <p:nvSpPr>
-          <p:cNvPr id="247" name="Google Shape;247;g3f55a0656d9_0_9:notes"/>
+          <p:cNvPr id="245" name="Google Shape;245;g3f55a0656d9_0_9:notes"/>
           <p:cNvSpPr/>
           <p:nvPr>
             <p:ph idx="2" type="sldImg"/>
@@ -1329,7 +1329,7 @@
   <p:cSld>
     <p:spTree>
       <p:nvGrpSpPr>
-        <p:cNvPr id="258" name="Shape 258"/>
+        <p:cNvPr id="256" name="Shape 256"/>
         <p:cNvGrpSpPr/>
         <p:nvPr/>
       </p:nvGrpSpPr>
@@ -1343,7 +1343,7 @@
       </p:grpSpPr>
       <p:sp>
         <p:nvSpPr>
-          <p:cNvPr id="259" name="Google Shape;259;g3f55a0656d9_0_32:notes"/>
+          <p:cNvPr id="257" name="Google Shape;257;g3f55a0656d9_0_32:notes"/>
           <p:cNvSpPr txBox="1"/>
           <p:nvPr>
             <p:ph idx="1" type="body"/>
@@ -1390,7 +1390,7 @@
       </p:sp>
       <p:sp>
         <p:nvSpPr>
-          <p:cNvPr id="260" name="Google Shape;260;g3f55a0656d9_0_32:notes"/>
+          <p:cNvPr id="258" name="Google Shape;258;g3f55a0656d9_0_32:notes"/>
           <p:cNvSpPr/>
           <p:nvPr>
             <p:ph idx="2" type="sldImg"/>
@@ -1446,7 +1446,7 @@
   <p:cSld>
     <p:spTree>
       <p:nvGrpSpPr>
-        <p:cNvPr id="268" name="Shape 268"/>
+        <p:cNvPr id="266" name="Shape 266"/>
         <p:cNvGrpSpPr/>
         <p:nvPr/>
       </p:nvGrpSpPr>
@@ -1460,7 +1460,7 @@
       </p:grpSpPr>
       <p:sp>
         <p:nvSpPr>
-          <p:cNvPr id="269" name="Google Shape;269;p13:notes"/>
+          <p:cNvPr id="267" name="Google Shape;267;p13:notes"/>
           <p:cNvSpPr txBox="1"/>
           <p:nvPr>
             <p:ph idx="1" type="body"/>
@@ -1507,7 +1507,7 @@
       </p:sp>
       <p:sp>
         <p:nvSpPr>
-          <p:cNvPr id="270" name="Google Shape;270;p13:notes"/>
+          <p:cNvPr id="268" name="Google Shape;268;p13:notes"/>
           <p:cNvSpPr/>
           <p:nvPr>
             <p:ph idx="2" type="sldImg"/>
@@ -1563,7 +1563,7 @@
   <p:cSld>
     <p:spTree>
       <p:nvGrpSpPr>
-        <p:cNvPr id="290" name="Shape 290"/>
+        <p:cNvPr id="288" name="Shape 288"/>
         <p:cNvGrpSpPr/>
         <p:nvPr/>
       </p:nvGrpSpPr>
@@ -1577,7 +1577,7 @@
       </p:grpSpPr>
       <p:sp>
         <p:nvSpPr>
-          <p:cNvPr id="291" name="Google Shape;291;p14:notes"/>
+          <p:cNvPr id="289" name="Google Shape;289;p14:notes"/>
           <p:cNvSpPr txBox="1"/>
           <p:nvPr>
             <p:ph idx="1" type="body"/>
@@ -1624,7 +1624,7 @@
       </p:sp>
       <p:sp>
         <p:nvSpPr>
-          <p:cNvPr id="292" name="Google Shape;292;p14:notes"/>
+          <p:cNvPr id="290" name="Google Shape;290;p14:notes"/>
           <p:cNvSpPr/>
           <p:nvPr>
             <p:ph idx="2" type="sldImg"/>
@@ -2265,7 +2265,7 @@
   <p:cSld>
     <p:spTree>
       <p:nvGrpSpPr>
-        <p:cNvPr id="174" name="Shape 174"/>
+        <p:cNvPr id="172" name="Shape 172"/>
         <p:cNvGrpSpPr/>
         <p:nvPr/>
       </p:nvGrpSpPr>
@@ -2279,7 +2279,7 @@
       </p:grpSpPr>
       <p:sp>
         <p:nvSpPr>
-          <p:cNvPr id="175" name="Google Shape;175;p7:notes"/>
+          <p:cNvPr id="173" name="Google Shape;173;p7:notes"/>
           <p:cNvSpPr txBox="1"/>
           <p:nvPr>
             <p:ph idx="1" type="body"/>
@@ -2326,7 +2326,7 @@
       </p:sp>
       <p:sp>
         <p:nvSpPr>
-          <p:cNvPr id="176" name="Google Shape;176;p7:notes"/>
+          <p:cNvPr id="174" name="Google Shape;174;p7:notes"/>
           <p:cNvSpPr/>
           <p:nvPr>
             <p:ph idx="2" type="sldImg"/>
@@ -2382,7 +2382,7 @@
   <p:cSld>
     <p:spTree>
       <p:nvGrpSpPr>
-        <p:cNvPr id="189" name="Shape 189"/>
+        <p:cNvPr id="187" name="Shape 187"/>
         <p:cNvGrpSpPr/>
         <p:nvPr/>
       </p:nvGrpSpPr>
@@ -2396,7 +2396,7 @@
       </p:grpSpPr>
       <p:sp>
         <p:nvSpPr>
-          <p:cNvPr id="190" name="Google Shape;190;p8:notes"/>
+          <p:cNvPr id="188" name="Google Shape;188;p8:notes"/>
           <p:cNvSpPr txBox="1"/>
           <p:nvPr>
             <p:ph idx="1" type="body"/>
@@ -2443,7 +2443,7 @@
       </p:sp>
       <p:sp>
         <p:nvSpPr>
-          <p:cNvPr id="191" name="Google Shape;191;p8:notes"/>
+          <p:cNvPr id="189" name="Google Shape;189;p8:notes"/>
           <p:cNvSpPr/>
           <p:nvPr>
             <p:ph idx="2" type="sldImg"/>
@@ -2499,7 +2499,7 @@
   <p:cSld>
     <p:spTree>
       <p:nvGrpSpPr>
-        <p:cNvPr id="204" name="Shape 204"/>
+        <p:cNvPr id="202" name="Shape 202"/>
         <p:cNvGrpSpPr/>
         <p:nvPr/>
       </p:nvGrpSpPr>
@@ -2513,7 +2513,7 @@
       </p:grpSpPr>
       <p:sp>
         <p:nvSpPr>
-          <p:cNvPr id="205" name="Google Shape;205;p9:notes"/>
+          <p:cNvPr id="203" name="Google Shape;203;p9:notes"/>
           <p:cNvSpPr txBox="1"/>
           <p:nvPr>
             <p:ph idx="1" type="body"/>
@@ -2560,7 +2560,7 @@
       </p:sp>
       <p:sp>
         <p:nvSpPr>
-          <p:cNvPr id="206" name="Google Shape;206;p9:notes"/>
+          <p:cNvPr id="204" name="Google Shape;204;p9:notes"/>
           <p:cNvSpPr/>
           <p:nvPr>
             <p:ph idx="2" type="sldImg"/>
@@ -16465,7 +16465,7 @@
     </p:bg>
     <p:spTree>
       <p:nvGrpSpPr>
-        <p:cNvPr id="222" name="Shape 222"/>
+        <p:cNvPr id="220" name="Shape 220"/>
         <p:cNvGrpSpPr/>
         <p:nvPr/>
       </p:nvGrpSpPr>
@@ -16479,7 +16479,7 @@
       </p:grpSpPr>
       <p:pic>
         <p:nvPicPr>
-          <p:cNvPr descr="image.png" id="223" name="Google Shape;223;p22"/>
+          <p:cNvPr descr="image.png" id="221" name="Google Shape;221;p22"/>
           <p:cNvPicPr preferRelativeResize="0"/>
           <p:nvPr/>
         </p:nvPicPr>
@@ -16506,7 +16506,7 @@
       </p:pic>
       <p:sp>
         <p:nvSpPr>
-          <p:cNvPr id="224" name="Google Shape;224;p22"/>
+          <p:cNvPr id="222" name="Google Shape;222;p22"/>
           <p:cNvSpPr txBox="1"/>
           <p:nvPr/>
         </p:nvSpPr>
@@ -16572,7 +16572,7 @@
       </p:sp>
       <p:sp>
         <p:nvSpPr>
-          <p:cNvPr id="225" name="Google Shape;225;p22"/>
+          <p:cNvPr id="223" name="Google Shape;223;p22"/>
           <p:cNvSpPr/>
           <p:nvPr/>
         </p:nvSpPr>
@@ -16631,7 +16631,7 @@
       </p:sp>
       <p:sp>
         <p:nvSpPr>
-          <p:cNvPr id="226" name="Google Shape;226;p22"/>
+          <p:cNvPr id="224" name="Google Shape;224;p22"/>
           <p:cNvSpPr txBox="1"/>
           <p:nvPr/>
         </p:nvSpPr>
@@ -16721,7 +16721,7 @@
       </p:sp>
       <p:sp>
         <p:nvSpPr>
-          <p:cNvPr id="227" name="Google Shape;227;p22"/>
+          <p:cNvPr id="225" name="Google Shape;225;p22"/>
           <p:cNvSpPr txBox="1"/>
           <p:nvPr/>
         </p:nvSpPr>
@@ -16787,7 +16787,7 @@
       </p:sp>
       <p:sp>
         <p:nvSpPr>
-          <p:cNvPr id="228" name="Google Shape;228;p22"/>
+          <p:cNvPr id="226" name="Google Shape;226;p22"/>
           <p:cNvSpPr txBox="1"/>
           <p:nvPr/>
         </p:nvSpPr>
@@ -16889,7 +16889,7 @@
       </p:sp>
       <p:sp>
         <p:nvSpPr>
-          <p:cNvPr id="229" name="Google Shape;229;p22"/>
+          <p:cNvPr id="227" name="Google Shape;227;p22"/>
           <p:cNvSpPr txBox="1"/>
           <p:nvPr/>
         </p:nvSpPr>
@@ -16967,7 +16967,7 @@
       </p:sp>
       <p:sp>
         <p:nvSpPr>
-          <p:cNvPr id="230" name="Google Shape;230;p22"/>
+          <p:cNvPr id="228" name="Google Shape;228;p22"/>
           <p:cNvSpPr txBox="1"/>
           <p:nvPr/>
         </p:nvSpPr>
@@ -17045,7 +17045,7 @@
       </p:sp>
       <p:sp>
         <p:nvSpPr>
-          <p:cNvPr id="231" name="Google Shape;231;p22"/>
+          <p:cNvPr id="229" name="Google Shape;229;p22"/>
           <p:cNvSpPr txBox="1"/>
           <p:nvPr/>
         </p:nvSpPr>
@@ -17111,7 +17111,7 @@
       </p:sp>
       <p:sp>
         <p:nvSpPr>
-          <p:cNvPr id="232" name="Google Shape;232;p22"/>
+          <p:cNvPr id="230" name="Google Shape;230;p22"/>
           <p:cNvSpPr txBox="1"/>
           <p:nvPr/>
         </p:nvSpPr>
@@ -17177,7 +17177,7 @@
       </p:sp>
       <p:pic>
         <p:nvPicPr>
-          <p:cNvPr id="233" name="Google Shape;233;p22" title="valence.png"/>
+          <p:cNvPr id="231" name="Google Shape;231;p22" title="valence.png"/>
           <p:cNvPicPr preferRelativeResize="0"/>
           <p:nvPr/>
         </p:nvPicPr>
@@ -17191,8 +17191,8 @@
         </p:blipFill>
         <p:spPr>
           <a:xfrm>
-            <a:off x="139850" y="2345550"/>
-            <a:ext cx="11805851" cy="4007625"/>
+            <a:off x="628050" y="2345550"/>
+            <a:ext cx="11174176" cy="3855225"/>
           </a:xfrm>
           <a:prstGeom prst="rect">
             <a:avLst/>
@@ -17223,7 +17223,7 @@
     </p:bg>
     <p:spTree>
       <p:nvGrpSpPr>
-        <p:cNvPr id="237" name="Shape 237"/>
+        <p:cNvPr id="235" name="Shape 235"/>
         <p:cNvGrpSpPr/>
         <p:nvPr/>
       </p:nvGrpSpPr>
@@ -17237,7 +17237,7 @@
       </p:grpSpPr>
       <p:pic>
         <p:nvPicPr>
-          <p:cNvPr descr="image.png" id="238" name="Google Shape;238;p23"/>
+          <p:cNvPr descr="image.png" id="236" name="Google Shape;236;p23"/>
           <p:cNvPicPr preferRelativeResize="0"/>
           <p:nvPr/>
         </p:nvPicPr>
@@ -17264,7 +17264,7 @@
       </p:pic>
       <p:sp>
         <p:nvSpPr>
-          <p:cNvPr id="239" name="Google Shape;239;p23"/>
+          <p:cNvPr id="237" name="Google Shape;237;p23"/>
           <p:cNvSpPr txBox="1"/>
           <p:nvPr/>
         </p:nvSpPr>
@@ -17330,7 +17330,7 @@
       </p:sp>
       <p:sp>
         <p:nvSpPr>
-          <p:cNvPr id="240" name="Google Shape;240;p23"/>
+          <p:cNvPr id="238" name="Google Shape;238;p23"/>
           <p:cNvSpPr/>
           <p:nvPr/>
         </p:nvSpPr>
@@ -17389,7 +17389,7 @@
       </p:sp>
       <p:sp>
         <p:nvSpPr>
-          <p:cNvPr id="241" name="Google Shape;241;p23"/>
+          <p:cNvPr id="239" name="Google Shape;239;p23"/>
           <p:cNvSpPr txBox="1"/>
           <p:nvPr/>
         </p:nvSpPr>
@@ -17479,7 +17479,7 @@
       </p:sp>
       <p:sp>
         <p:nvSpPr>
-          <p:cNvPr id="242" name="Google Shape;242;p23"/>
+          <p:cNvPr id="240" name="Google Shape;240;p23"/>
           <p:cNvSpPr txBox="1"/>
           <p:nvPr/>
         </p:nvSpPr>
@@ -17545,7 +17545,7 @@
       </p:sp>
       <p:sp>
         <p:nvSpPr>
-          <p:cNvPr id="243" name="Google Shape;243;p23"/>
+          <p:cNvPr id="241" name="Google Shape;241;p23"/>
           <p:cNvSpPr txBox="1"/>
           <p:nvPr/>
         </p:nvSpPr>
@@ -17635,7 +17635,7 @@
       </p:sp>
       <p:pic>
         <p:nvPicPr>
-          <p:cNvPr id="244" name="Google Shape;244;p23" title="bpm.png"/>
+          <p:cNvPr id="242" name="Google Shape;242;p23" title="bpm.png"/>
           <p:cNvPicPr preferRelativeResize="0"/>
           <p:nvPr/>
         </p:nvPicPr>
@@ -17680,7 +17680,7 @@
     </p:bg>
     <p:spTree>
       <p:nvGrpSpPr>
-        <p:cNvPr id="248" name="Shape 248"/>
+        <p:cNvPr id="246" name="Shape 246"/>
         <p:cNvGrpSpPr/>
         <p:nvPr/>
       </p:nvGrpSpPr>
@@ -17694,7 +17694,7 @@
       </p:grpSpPr>
       <p:pic>
         <p:nvPicPr>
-          <p:cNvPr descr="image.png" id="249" name="Google Shape;249;p24"/>
+          <p:cNvPr descr="image.png" id="247" name="Google Shape;247;p24"/>
           <p:cNvPicPr preferRelativeResize="0"/>
           <p:nvPr/>
         </p:nvPicPr>
@@ -17721,7 +17721,7 @@
       </p:pic>
       <p:sp>
         <p:nvSpPr>
-          <p:cNvPr id="250" name="Google Shape;250;p24"/>
+          <p:cNvPr id="248" name="Google Shape;248;p24"/>
           <p:cNvSpPr txBox="1"/>
           <p:nvPr/>
         </p:nvSpPr>
@@ -17787,7 +17787,7 @@
       </p:sp>
       <p:sp>
         <p:nvSpPr>
-          <p:cNvPr id="251" name="Google Shape;251;p24"/>
+          <p:cNvPr id="249" name="Google Shape;249;p24"/>
           <p:cNvSpPr/>
           <p:nvPr/>
         </p:nvSpPr>
@@ -17846,7 +17846,7 @@
       </p:sp>
       <p:sp>
         <p:nvSpPr>
-          <p:cNvPr id="252" name="Google Shape;252;p24"/>
+          <p:cNvPr id="250" name="Google Shape;250;p24"/>
           <p:cNvSpPr txBox="1"/>
           <p:nvPr/>
         </p:nvSpPr>
@@ -17936,7 +17936,7 @@
       </p:sp>
       <p:sp>
         <p:nvSpPr>
-          <p:cNvPr id="253" name="Google Shape;253;p24"/>
+          <p:cNvPr id="251" name="Google Shape;251;p24"/>
           <p:cNvSpPr txBox="1"/>
           <p:nvPr/>
         </p:nvSpPr>
@@ -18002,7 +18002,7 @@
       </p:sp>
       <p:sp>
         <p:nvSpPr>
-          <p:cNvPr id="254" name="Google Shape;254;p24"/>
+          <p:cNvPr id="252" name="Google Shape;252;p24"/>
           <p:cNvSpPr txBox="1"/>
           <p:nvPr/>
         </p:nvSpPr>
@@ -18092,7 +18092,7 @@
       </p:sp>
       <p:sp>
         <p:nvSpPr>
-          <p:cNvPr id="255" name="Google Shape;255;p24"/>
+          <p:cNvPr id="253" name="Google Shape;253;p24"/>
           <p:cNvSpPr txBox="1"/>
           <p:nvPr/>
         </p:nvSpPr>
@@ -18158,7 +18158,7 @@
       </p:sp>
       <p:pic>
         <p:nvPicPr>
-          <p:cNvPr descr="image.png" id="256" name="Google Shape;256;p24"/>
+          <p:cNvPr descr="image.png" id="254" name="Google Shape;254;p24"/>
           <p:cNvPicPr preferRelativeResize="0"/>
           <p:nvPr/>
         </p:nvPicPr>
@@ -18185,7 +18185,7 @@
       </p:pic>
       <p:pic>
         <p:nvPicPr>
-          <p:cNvPr id="257" name="Google Shape;257;p24" title="attr.png"/>
+          <p:cNvPr id="255" name="Google Shape;255;p24" title="attr.png"/>
           <p:cNvPicPr preferRelativeResize="0"/>
           <p:nvPr/>
         </p:nvPicPr>
@@ -18231,7 +18231,7 @@
     </p:bg>
     <p:spTree>
       <p:nvGrpSpPr>
-        <p:cNvPr id="261" name="Shape 261"/>
+        <p:cNvPr id="259" name="Shape 259"/>
         <p:cNvGrpSpPr/>
         <p:nvPr/>
       </p:nvGrpSpPr>
@@ -18245,7 +18245,7 @@
       </p:grpSpPr>
       <p:pic>
         <p:nvPicPr>
-          <p:cNvPr descr="image.png" id="262" name="Google Shape;262;p25"/>
+          <p:cNvPr descr="image.png" id="260" name="Google Shape;260;p25"/>
           <p:cNvPicPr preferRelativeResize="0"/>
           <p:nvPr/>
         </p:nvPicPr>
@@ -18272,7 +18272,7 @@
       </p:pic>
       <p:sp>
         <p:nvSpPr>
-          <p:cNvPr id="263" name="Google Shape;263;p25"/>
+          <p:cNvPr id="261" name="Google Shape;261;p25"/>
           <p:cNvSpPr txBox="1"/>
           <p:nvPr/>
         </p:nvSpPr>
@@ -18338,7 +18338,7 @@
       </p:sp>
       <p:sp>
         <p:nvSpPr>
-          <p:cNvPr id="264" name="Google Shape;264;p25"/>
+          <p:cNvPr id="262" name="Google Shape;262;p25"/>
           <p:cNvSpPr/>
           <p:nvPr/>
         </p:nvSpPr>
@@ -18397,7 +18397,7 @@
       </p:sp>
       <p:sp>
         <p:nvSpPr>
-          <p:cNvPr id="265" name="Google Shape;265;p25"/>
+          <p:cNvPr id="263" name="Google Shape;263;p25"/>
           <p:cNvSpPr txBox="1"/>
           <p:nvPr/>
         </p:nvSpPr>
@@ -18463,7 +18463,7 @@
       </p:sp>
       <p:sp>
         <p:nvSpPr>
-          <p:cNvPr id="266" name="Google Shape;266;p25"/>
+          <p:cNvPr id="264" name="Google Shape;264;p25"/>
           <p:cNvSpPr txBox="1"/>
           <p:nvPr/>
         </p:nvSpPr>
@@ -18553,7 +18553,7 @@
       </p:sp>
       <p:pic>
         <p:nvPicPr>
-          <p:cNvPr id="267" name="Google Shape;267;p25"/>
+          <p:cNvPr id="265" name="Google Shape;265;p25"/>
           <p:cNvPicPr preferRelativeResize="0"/>
           <p:nvPr/>
         </p:nvPicPr>
@@ -18599,7 +18599,7 @@
     </p:bg>
     <p:spTree>
       <p:nvGrpSpPr>
-        <p:cNvPr id="271" name="Shape 271"/>
+        <p:cNvPr id="269" name="Shape 269"/>
         <p:cNvGrpSpPr/>
         <p:nvPr/>
       </p:nvGrpSpPr>
@@ -18613,7 +18613,7 @@
       </p:grpSpPr>
       <p:pic>
         <p:nvPicPr>
-          <p:cNvPr descr="image.png" id="272" name="Google Shape;272;p26"/>
+          <p:cNvPr descr="image.png" id="270" name="Google Shape;270;p26"/>
           <p:cNvPicPr preferRelativeResize="0"/>
           <p:nvPr/>
         </p:nvPicPr>
@@ -18640,7 +18640,7 @@
       </p:pic>
       <p:pic>
         <p:nvPicPr>
-          <p:cNvPr descr="image.png" id="273" name="Google Shape;273;p26"/>
+          <p:cNvPr descr="image.png" id="271" name="Google Shape;271;p26"/>
           <p:cNvPicPr preferRelativeResize="0"/>
           <p:nvPr/>
         </p:nvPicPr>
@@ -18667,7 +18667,7 @@
       </p:pic>
       <p:pic>
         <p:nvPicPr>
-          <p:cNvPr descr="image.png" id="274" name="Google Shape;274;p26"/>
+          <p:cNvPr descr="image.png" id="272" name="Google Shape;272;p26"/>
           <p:cNvPicPr preferRelativeResize="0"/>
           <p:nvPr/>
         </p:nvPicPr>
@@ -18694,7 +18694,7 @@
       </p:pic>
       <p:pic>
         <p:nvPicPr>
-          <p:cNvPr descr="image.png" id="275" name="Google Shape;275;p26"/>
+          <p:cNvPr descr="image.png" id="273" name="Google Shape;273;p26"/>
           <p:cNvPicPr preferRelativeResize="0"/>
           <p:nvPr/>
         </p:nvPicPr>
@@ -18721,7 +18721,7 @@
       </p:pic>
       <p:sp>
         <p:nvSpPr>
-          <p:cNvPr id="276" name="Google Shape;276;p26"/>
+          <p:cNvPr id="274" name="Google Shape;274;p26"/>
           <p:cNvSpPr txBox="1"/>
           <p:nvPr/>
         </p:nvSpPr>
@@ -18787,7 +18787,7 @@
       </p:sp>
       <p:sp>
         <p:nvSpPr>
-          <p:cNvPr id="277" name="Google Shape;277;p26"/>
+          <p:cNvPr id="275" name="Google Shape;275;p26"/>
           <p:cNvSpPr/>
           <p:nvPr/>
         </p:nvSpPr>
@@ -18846,7 +18846,7 @@
       </p:sp>
       <p:sp>
         <p:nvSpPr>
-          <p:cNvPr id="278" name="Google Shape;278;p26"/>
+          <p:cNvPr id="276" name="Google Shape;276;p26"/>
           <p:cNvSpPr txBox="1"/>
           <p:nvPr/>
         </p:nvSpPr>
@@ -18960,7 +18960,7 @@
       </p:sp>
       <p:sp>
         <p:nvSpPr>
-          <p:cNvPr id="279" name="Google Shape;279;p26"/>
+          <p:cNvPr id="277" name="Google Shape;277;p26"/>
           <p:cNvSpPr txBox="1"/>
           <p:nvPr/>
         </p:nvSpPr>
@@ -19026,7 +19026,7 @@
       </p:sp>
       <p:sp>
         <p:nvSpPr>
-          <p:cNvPr id="280" name="Google Shape;280;p26"/>
+          <p:cNvPr id="278" name="Google Shape;278;p26"/>
           <p:cNvSpPr txBox="1"/>
           <p:nvPr/>
         </p:nvSpPr>
@@ -19116,7 +19116,7 @@
       </p:sp>
       <p:sp>
         <p:nvSpPr>
-          <p:cNvPr id="281" name="Google Shape;281;p26"/>
+          <p:cNvPr id="279" name="Google Shape;279;p26"/>
           <p:cNvSpPr txBox="1"/>
           <p:nvPr/>
         </p:nvSpPr>
@@ -19182,7 +19182,7 @@
       </p:sp>
       <p:sp>
         <p:nvSpPr>
-          <p:cNvPr id="282" name="Google Shape;282;p26"/>
+          <p:cNvPr id="280" name="Google Shape;280;p26"/>
           <p:cNvSpPr txBox="1"/>
           <p:nvPr/>
         </p:nvSpPr>
@@ -19248,7 +19248,7 @@
       </p:sp>
       <p:sp>
         <p:nvSpPr>
-          <p:cNvPr id="283" name="Google Shape;283;p26"/>
+          <p:cNvPr id="281" name="Google Shape;281;p26"/>
           <p:cNvSpPr txBox="1"/>
           <p:nvPr/>
         </p:nvSpPr>
@@ -19314,7 +19314,7 @@
       </p:sp>
       <p:sp>
         <p:nvSpPr>
-          <p:cNvPr id="284" name="Google Shape;284;p26"/>
+          <p:cNvPr id="282" name="Google Shape;282;p26"/>
           <p:cNvSpPr txBox="1"/>
           <p:nvPr/>
         </p:nvSpPr>
@@ -19380,7 +19380,7 @@
       </p:sp>
       <p:sp>
         <p:nvSpPr>
-          <p:cNvPr id="285" name="Google Shape;285;p26"/>
+          <p:cNvPr id="283" name="Google Shape;283;p26"/>
           <p:cNvSpPr txBox="1"/>
           <p:nvPr/>
         </p:nvSpPr>
@@ -19446,7 +19446,7 @@
       </p:sp>
       <p:sp>
         <p:nvSpPr>
-          <p:cNvPr id="286" name="Google Shape;286;p26"/>
+          <p:cNvPr id="284" name="Google Shape;284;p26"/>
           <p:cNvSpPr txBox="1"/>
           <p:nvPr/>
         </p:nvSpPr>
@@ -19512,7 +19512,7 @@
       </p:sp>
       <p:pic>
         <p:nvPicPr>
-          <p:cNvPr descr="image.png" id="287" name="Google Shape;287;p26"/>
+          <p:cNvPr descr="image.png" id="285" name="Google Shape;285;p26"/>
           <p:cNvPicPr preferRelativeResize="0"/>
           <p:nvPr/>
         </p:nvPicPr>
@@ -19539,7 +19539,7 @@
       </p:pic>
       <p:pic>
         <p:nvPicPr>
-          <p:cNvPr descr="image.png" id="288" name="Google Shape;288;p26"/>
+          <p:cNvPr descr="image.png" id="286" name="Google Shape;286;p26"/>
           <p:cNvPicPr preferRelativeResize="0"/>
           <p:nvPr/>
         </p:nvPicPr>
@@ -19566,7 +19566,7 @@
       </p:pic>
       <p:pic>
         <p:nvPicPr>
-          <p:cNvPr descr="image.png" id="289" name="Google Shape;289;p26"/>
+          <p:cNvPr descr="image.png" id="287" name="Google Shape;287;p26"/>
           <p:cNvPicPr preferRelativeResize="0"/>
           <p:nvPr/>
         </p:nvPicPr>
@@ -19611,7 +19611,7 @@
     </p:bg>
     <p:spTree>
       <p:nvGrpSpPr>
-        <p:cNvPr id="293" name="Shape 293"/>
+        <p:cNvPr id="291" name="Shape 291"/>
         <p:cNvGrpSpPr/>
         <p:nvPr/>
       </p:nvGrpSpPr>
@@ -19625,7 +19625,7 @@
       </p:grpSpPr>
       <p:pic>
         <p:nvPicPr>
-          <p:cNvPr descr="image.png" id="294" name="Google Shape;294;p27"/>
+          <p:cNvPr descr="image.png" id="292" name="Google Shape;292;p27"/>
           <p:cNvPicPr preferRelativeResize="0"/>
           <p:nvPr/>
         </p:nvPicPr>
@@ -19652,7 +19652,7 @@
       </p:pic>
       <p:sp>
         <p:nvSpPr>
-          <p:cNvPr id="295" name="Google Shape;295;p27"/>
+          <p:cNvPr id="293" name="Google Shape;293;p27"/>
           <p:cNvSpPr txBox="1"/>
           <p:nvPr/>
         </p:nvSpPr>
@@ -19718,7 +19718,7 @@
       </p:sp>
       <p:sp>
         <p:nvSpPr>
-          <p:cNvPr id="296" name="Google Shape;296;p27"/>
+          <p:cNvPr id="294" name="Google Shape;294;p27"/>
           <p:cNvSpPr/>
           <p:nvPr/>
         </p:nvSpPr>
@@ -19777,7 +19777,7 @@
       </p:sp>
       <p:sp>
         <p:nvSpPr>
-          <p:cNvPr id="297" name="Google Shape;297;p27"/>
+          <p:cNvPr id="295" name="Google Shape;295;p27"/>
           <p:cNvSpPr txBox="1"/>
           <p:nvPr/>
         </p:nvSpPr>
@@ -19867,7 +19867,7 @@
       </p:sp>
       <p:sp>
         <p:nvSpPr>
-          <p:cNvPr id="298" name="Google Shape;298;p27"/>
+          <p:cNvPr id="296" name="Google Shape;296;p27"/>
           <p:cNvSpPr txBox="1"/>
           <p:nvPr/>
         </p:nvSpPr>
@@ -19933,7 +19933,7 @@
       </p:sp>
       <p:sp>
         <p:nvSpPr>
-          <p:cNvPr id="299" name="Google Shape;299;p27"/>
+          <p:cNvPr id="297" name="Google Shape;297;p27"/>
           <p:cNvSpPr txBox="1"/>
           <p:nvPr/>
         </p:nvSpPr>
@@ -20023,7 +20023,7 @@
       </p:sp>
       <p:graphicFrame>
         <p:nvGraphicFramePr>
-          <p:cNvPr id="300" name="Google Shape;300;p27"/>
+          <p:cNvPr id="298" name="Google Shape;298;p27"/>
           <p:cNvGraphicFramePr/>
           <p:nvPr/>
         </p:nvGraphicFramePr>
@@ -20036,7 +20036,7 @@
             <a:tbl>
               <a:tblPr bandRow="1" firstRow="1">
                 <a:noFill/>
-                <a:tableStyleId>{BCD3BDA4-9364-4038-8248-52F9C7BDEF5E}</a:tableStyleId>
+                <a:tableStyleId>{3B7A2CC3-4359-4893-8B18-93577F445FBB}</a:tableStyleId>
               </a:tblPr>
               <a:tblGrid>
                 <a:gridCol w="1584575"/>
@@ -20564,7 +20564,7 @@
       </p:graphicFrame>
       <p:sp>
         <p:nvSpPr>
-          <p:cNvPr id="301" name="Google Shape;301;p27"/>
+          <p:cNvPr id="299" name="Google Shape;299;p27"/>
           <p:cNvSpPr txBox="1"/>
           <p:nvPr/>
         </p:nvSpPr>
@@ -20642,7 +20642,7 @@
       </p:sp>
       <p:sp>
         <p:nvSpPr>
-          <p:cNvPr id="302" name="Google Shape;302;p27"/>
+          <p:cNvPr id="300" name="Google Shape;300;p27"/>
           <p:cNvSpPr/>
           <p:nvPr/>
         </p:nvSpPr>
@@ -20701,7 +20701,7 @@
       </p:sp>
       <p:sp>
         <p:nvSpPr>
-          <p:cNvPr id="303" name="Google Shape;303;p27"/>
+          <p:cNvPr id="301" name="Google Shape;301;p27"/>
           <p:cNvSpPr/>
           <p:nvPr/>
         </p:nvSpPr>
@@ -20760,7 +20760,7 @@
       </p:sp>
       <p:sp>
         <p:nvSpPr>
-          <p:cNvPr id="304" name="Google Shape;304;p27"/>
+          <p:cNvPr id="302" name="Google Shape;302;p27"/>
           <p:cNvSpPr/>
           <p:nvPr/>
         </p:nvSpPr>
@@ -20819,7 +20819,7 @@
       </p:sp>
       <p:sp>
         <p:nvSpPr>
-          <p:cNvPr id="305" name="Google Shape;305;p27"/>
+          <p:cNvPr id="303" name="Google Shape;303;p27"/>
           <p:cNvSpPr/>
           <p:nvPr/>
         </p:nvSpPr>
@@ -20878,7 +20878,7 @@
       </p:sp>
       <p:sp>
         <p:nvSpPr>
-          <p:cNvPr id="306" name="Google Shape;306;p27"/>
+          <p:cNvPr id="304" name="Google Shape;304;p27"/>
           <p:cNvSpPr/>
           <p:nvPr/>
         </p:nvSpPr>
@@ -20937,7 +20937,7 @@
       </p:sp>
       <p:sp>
         <p:nvSpPr>
-          <p:cNvPr id="307" name="Google Shape;307;p27"/>
+          <p:cNvPr id="305" name="Google Shape;305;p27"/>
           <p:cNvSpPr/>
           <p:nvPr/>
         </p:nvSpPr>
@@ -20996,7 +20996,7 @@
       </p:sp>
       <p:sp>
         <p:nvSpPr>
-          <p:cNvPr id="308" name="Google Shape;308;p27"/>
+          <p:cNvPr id="306" name="Google Shape;306;p27"/>
           <p:cNvSpPr/>
           <p:nvPr/>
         </p:nvSpPr>
@@ -21055,7 +21055,7 @@
       </p:sp>
       <p:sp>
         <p:nvSpPr>
-          <p:cNvPr id="309" name="Google Shape;309;p27"/>
+          <p:cNvPr id="307" name="Google Shape;307;p27"/>
           <p:cNvSpPr/>
           <p:nvPr/>
         </p:nvSpPr>
@@ -21114,7 +21114,7 @@
       </p:sp>
       <p:sp>
         <p:nvSpPr>
-          <p:cNvPr id="310" name="Google Shape;310;p27"/>
+          <p:cNvPr id="308" name="Google Shape;308;p27"/>
           <p:cNvSpPr/>
           <p:nvPr/>
         </p:nvSpPr>
@@ -21173,7 +21173,7 @@
       </p:sp>
       <p:pic>
         <p:nvPicPr>
-          <p:cNvPr descr="image.png" id="311" name="Google Shape;311;p27"/>
+          <p:cNvPr descr="image.png" id="309" name="Google Shape;309;p27"/>
           <p:cNvPicPr preferRelativeResize="0"/>
           <p:nvPr/>
         </p:nvPicPr>
@@ -21200,7 +21200,7 @@
       </p:pic>
       <p:sp>
         <p:nvSpPr>
-          <p:cNvPr id="312" name="Google Shape;312;p27"/>
+          <p:cNvPr id="310" name="Google Shape;310;p27"/>
           <p:cNvSpPr txBox="1"/>
           <p:nvPr/>
         </p:nvSpPr>
@@ -21266,7 +21266,7 @@
       </p:sp>
       <p:pic>
         <p:nvPicPr>
-          <p:cNvPr id="313" name="Google Shape;313;p27" title="qrcode_github.com.png"/>
+          <p:cNvPr id="311" name="Google Shape;311;p27" title="qrcode_github.com.png"/>
           <p:cNvPicPr preferRelativeResize="0"/>
           <p:nvPr/>
         </p:nvPicPr>
@@ -24972,7 +24972,31 @@
                 <a:cs typeface="Inter"/>
                 <a:sym typeface="Inter"/>
               </a:rPr>
-              <a:t>: Le hit moderne hanno ridotto la loro estensione di oltre 45 secondi nell'ultimo decennio.</a:t>
+              <a:t>: Le hit moderne (&gt;90)</a:t>
+            </a:r>
+            <a:r>
+              <a:rPr lang="en-US" sz="1350">
+                <a:solidFill>
+                  <a:srgbClr val="334155"/>
+                </a:solidFill>
+                <a:latin typeface="Inter"/>
+                <a:ea typeface="Inter"/>
+                <a:cs typeface="Inter"/>
+                <a:sym typeface="Inter"/>
+              </a:rPr>
+              <a:t> </a:t>
+            </a:r>
+            <a:r>
+              <a:rPr b="0" i="0" lang="en-US" sz="1350" u="none" cap="none" strike="noStrike">
+                <a:solidFill>
+                  <a:srgbClr val="334155"/>
+                </a:solidFill>
+                <a:latin typeface="Inter"/>
+                <a:ea typeface="Inter"/>
+                <a:cs typeface="Inter"/>
+                <a:sym typeface="Inter"/>
+              </a:rPr>
+              <a:t>hanno ridotto la loro estensione di oltre 45 secondi nell'ultimo decennio.</a:t>
             </a:r>
             <a:endParaRPr b="0" i="0" sz="1400" u="none" cap="none" strike="noStrike">
               <a:solidFill>
@@ -25064,155 +25088,24 @@
           </a:p>
         </p:txBody>
       </p:sp>
-      <p:sp>
-        <p:nvSpPr>
-          <p:cNvPr id="171" name="Google Shape;171;p18"/>
-          <p:cNvSpPr txBox="1"/>
-          <p:nvPr/>
-        </p:nvSpPr>
-        <p:spPr>
-          <a:xfrm>
-            <a:off x="7605712" y="2913608"/>
-            <a:ext cx="133350" cy="361950"/>
-          </a:xfrm>
-          <a:prstGeom prst="rect">
-            <a:avLst/>
-          </a:prstGeom>
-          <a:noFill/>
-          <a:ln>
-            <a:noFill/>
-          </a:ln>
-        </p:spPr>
-        <p:txBody>
-          <a:bodyPr anchorCtr="0" anchor="t" bIns="0" lIns="0" spcFirstLastPara="1" rIns="0" wrap="square" tIns="0">
-            <a:spAutoFit/>
-          </a:bodyPr>
-          <a:lstStyle/>
-          <a:p>
-            <a:pPr indent="0" lvl="0" marL="0" marR="0" rtl="0" algn="l">
-              <a:lnSpc>
-                <a:spcPct val="159944"/>
-              </a:lnSpc>
-              <a:spcBef>
-                <a:spcPts val="0"/>
-              </a:spcBef>
-              <a:spcAft>
-                <a:spcPts val="0"/>
-              </a:spcAft>
-              <a:buClr>
-                <a:srgbClr val="000000"/>
-              </a:buClr>
-              <a:buSzPts val="1800"/>
-              <a:buFont typeface="Arial"/>
-              <a:buNone/>
-            </a:pPr>
-            <a:r>
-              <a:rPr b="0" i="0" lang="en-US" sz="1800" u="none" cap="none" strike="noStrike">
-                <a:solidFill>
-                  <a:srgbClr val="FF6D00"/>
-                </a:solidFill>
-                <a:latin typeface="Inter"/>
-                <a:ea typeface="Inter"/>
-                <a:cs typeface="Inter"/>
-                <a:sym typeface="Inter"/>
-              </a:rPr>
-              <a:t>•</a:t>
-            </a:r>
-            <a:endParaRPr b="0" i="0" sz="1400" u="none" cap="none" strike="noStrike">
-              <a:solidFill>
-                <a:srgbClr val="000000"/>
-              </a:solidFill>
-              <a:latin typeface="Arial"/>
-              <a:ea typeface="Arial"/>
-              <a:cs typeface="Arial"/>
-              <a:sym typeface="Arial"/>
-            </a:endParaRPr>
-          </a:p>
-        </p:txBody>
-      </p:sp>
-      <p:sp>
-        <p:nvSpPr>
-          <p:cNvPr id="172" name="Google Shape;172;p18"/>
-          <p:cNvSpPr txBox="1"/>
-          <p:nvPr/>
-        </p:nvSpPr>
-        <p:spPr>
-          <a:xfrm>
-            <a:off x="7605712" y="3926978"/>
-            <a:ext cx="133350" cy="361950"/>
-          </a:xfrm>
-          <a:prstGeom prst="rect">
-            <a:avLst/>
-          </a:prstGeom>
-          <a:noFill/>
-          <a:ln>
-            <a:noFill/>
-          </a:ln>
-        </p:spPr>
-        <p:txBody>
-          <a:bodyPr anchorCtr="0" anchor="t" bIns="0" lIns="0" spcFirstLastPara="1" rIns="0" wrap="square" tIns="0">
-            <a:spAutoFit/>
-          </a:bodyPr>
-          <a:lstStyle/>
-          <a:p>
-            <a:pPr indent="0" lvl="0" marL="0" marR="0" rtl="0" algn="l">
-              <a:lnSpc>
-                <a:spcPct val="159944"/>
-              </a:lnSpc>
-              <a:spcBef>
-                <a:spcPts val="0"/>
-              </a:spcBef>
-              <a:spcAft>
-                <a:spcPts val="0"/>
-              </a:spcAft>
-              <a:buClr>
-                <a:srgbClr val="000000"/>
-              </a:buClr>
-              <a:buSzPts val="1800"/>
-              <a:buFont typeface="Arial"/>
-              <a:buNone/>
-            </a:pPr>
-            <a:r>
-              <a:rPr b="0" i="0" lang="en-US" sz="1800" u="none" cap="none" strike="noStrike">
-                <a:solidFill>
-                  <a:srgbClr val="FF6D00"/>
-                </a:solidFill>
-                <a:latin typeface="Inter"/>
-                <a:ea typeface="Inter"/>
-                <a:cs typeface="Inter"/>
-                <a:sym typeface="Inter"/>
-              </a:rPr>
-              <a:t>•</a:t>
-            </a:r>
-            <a:endParaRPr b="0" i="0" sz="1400" u="none" cap="none" strike="noStrike">
-              <a:solidFill>
-                <a:srgbClr val="000000"/>
-              </a:solidFill>
-              <a:latin typeface="Arial"/>
-              <a:ea typeface="Arial"/>
-              <a:cs typeface="Arial"/>
-              <a:sym typeface="Arial"/>
-            </a:endParaRPr>
-          </a:p>
-        </p:txBody>
-      </p:sp>
       <p:pic>
         <p:nvPicPr>
-          <p:cNvPr id="173" name="Google Shape;173;p18" title="duration.png"/>
+          <p:cNvPr id="171" name="Google Shape;171;p18"/>
           <p:cNvPicPr preferRelativeResize="0"/>
           <p:nvPr/>
         </p:nvPicPr>
-        <p:blipFill rotWithShape="1">
+        <p:blipFill>
           <a:blip r:embed="rId4">
             <a:alphaModFix/>
           </a:blip>
-          <a:srcRect b="0" l="0" r="0" t="0"/>
-          <a:stretch/>
+          <a:stretch>
+            <a:fillRect/>
+          </a:stretch>
         </p:blipFill>
         <p:spPr>
           <a:xfrm>
-            <a:off x="125600" y="1377100"/>
-            <a:ext cx="11820176" cy="3815951"/>
+            <a:off x="771525" y="1377100"/>
+            <a:ext cx="10875750" cy="4028250"/>
           </a:xfrm>
           <a:prstGeom prst="rect">
             <a:avLst/>
@@ -25243,7 +25136,7 @@
     </p:bg>
     <p:spTree>
       <p:nvGrpSpPr>
-        <p:cNvPr id="177" name="Shape 177"/>
+        <p:cNvPr id="175" name="Shape 175"/>
         <p:cNvGrpSpPr/>
         <p:nvPr/>
       </p:nvGrpSpPr>
@@ -25257,7 +25150,7 @@
       </p:grpSpPr>
       <p:pic>
         <p:nvPicPr>
-          <p:cNvPr descr="image.png" id="178" name="Google Shape;178;p19"/>
+          <p:cNvPr descr="image.png" id="176" name="Google Shape;176;p19"/>
           <p:cNvPicPr preferRelativeResize="0"/>
           <p:nvPr/>
         </p:nvPicPr>
@@ -25284,7 +25177,7 @@
       </p:pic>
       <p:sp>
         <p:nvSpPr>
-          <p:cNvPr id="179" name="Google Shape;179;p19"/>
+          <p:cNvPr id="177" name="Google Shape;177;p19"/>
           <p:cNvSpPr txBox="1"/>
           <p:nvPr/>
         </p:nvSpPr>
@@ -25350,7 +25243,7 @@
       </p:sp>
       <p:sp>
         <p:nvSpPr>
-          <p:cNvPr id="180" name="Google Shape;180;p19"/>
+          <p:cNvPr id="178" name="Google Shape;178;p19"/>
           <p:cNvSpPr/>
           <p:nvPr/>
         </p:nvSpPr>
@@ -25409,7 +25302,7 @@
       </p:sp>
       <p:sp>
         <p:nvSpPr>
-          <p:cNvPr id="181" name="Google Shape;181;p19"/>
+          <p:cNvPr id="179" name="Google Shape;179;p19"/>
           <p:cNvSpPr txBox="1"/>
           <p:nvPr/>
         </p:nvSpPr>
@@ -25499,7 +25392,7 @@
       </p:sp>
       <p:sp>
         <p:nvSpPr>
-          <p:cNvPr id="182" name="Google Shape;182;p19"/>
+          <p:cNvPr id="180" name="Google Shape;180;p19"/>
           <p:cNvSpPr txBox="1"/>
           <p:nvPr/>
         </p:nvSpPr>
@@ -25565,7 +25458,7 @@
       </p:sp>
       <p:sp>
         <p:nvSpPr>
-          <p:cNvPr id="183" name="Google Shape;183;p19"/>
+          <p:cNvPr id="181" name="Google Shape;181;p19"/>
           <p:cNvSpPr txBox="1"/>
           <p:nvPr/>
         </p:nvSpPr>
@@ -25643,7 +25536,7 @@
       </p:sp>
       <p:sp>
         <p:nvSpPr>
-          <p:cNvPr id="184" name="Google Shape;184;p19"/>
+          <p:cNvPr id="182" name="Google Shape;182;p19"/>
           <p:cNvSpPr txBox="1"/>
           <p:nvPr/>
         </p:nvSpPr>
@@ -25745,7 +25638,7 @@
       </p:sp>
       <p:sp>
         <p:nvSpPr>
-          <p:cNvPr id="185" name="Google Shape;185;p19"/>
+          <p:cNvPr id="183" name="Google Shape;183;p19"/>
           <p:cNvSpPr txBox="1"/>
           <p:nvPr/>
         </p:nvSpPr>
@@ -25823,7 +25716,7 @@
       </p:sp>
       <p:sp>
         <p:nvSpPr>
-          <p:cNvPr id="186" name="Google Shape;186;p19"/>
+          <p:cNvPr id="184" name="Google Shape;184;p19"/>
           <p:cNvSpPr txBox="1"/>
           <p:nvPr/>
         </p:nvSpPr>
@@ -25889,7 +25782,7 @@
       </p:sp>
       <p:sp>
         <p:nvSpPr>
-          <p:cNvPr id="187" name="Google Shape;187;p19"/>
+          <p:cNvPr id="185" name="Google Shape;185;p19"/>
           <p:cNvSpPr txBox="1"/>
           <p:nvPr/>
         </p:nvSpPr>
@@ -25955,7 +25848,7 @@
       </p:sp>
       <p:pic>
         <p:nvPicPr>
-          <p:cNvPr id="188" name="Google Shape;188;p19" title="dance.png"/>
+          <p:cNvPr id="186" name="Google Shape;186;p19" title="dance.png"/>
           <p:cNvPicPr preferRelativeResize="0"/>
           <p:nvPr/>
         </p:nvPicPr>
@@ -25969,8 +25862,8 @@
         </p:blipFill>
         <p:spPr>
           <a:xfrm>
-            <a:off x="444550" y="1979400"/>
-            <a:ext cx="11501149" cy="4373775"/>
+            <a:off x="682675" y="2095450"/>
+            <a:ext cx="11031300" cy="4105325"/>
           </a:xfrm>
           <a:prstGeom prst="rect">
             <a:avLst/>
@@ -26001,7 +25894,7 @@
     </p:bg>
     <p:spTree>
       <p:nvGrpSpPr>
-        <p:cNvPr id="192" name="Shape 192"/>
+        <p:cNvPr id="190" name="Shape 190"/>
         <p:cNvGrpSpPr/>
         <p:nvPr/>
       </p:nvGrpSpPr>
@@ -26015,7 +25908,7 @@
       </p:grpSpPr>
       <p:pic>
         <p:nvPicPr>
-          <p:cNvPr descr="image.png" id="193" name="Google Shape;193;p20"/>
+          <p:cNvPr descr="image.png" id="191" name="Google Shape;191;p20"/>
           <p:cNvPicPr preferRelativeResize="0"/>
           <p:nvPr/>
         </p:nvPicPr>
@@ -26042,7 +25935,7 @@
       </p:pic>
       <p:sp>
         <p:nvSpPr>
-          <p:cNvPr id="194" name="Google Shape;194;p20"/>
+          <p:cNvPr id="192" name="Google Shape;192;p20"/>
           <p:cNvSpPr txBox="1"/>
           <p:nvPr/>
         </p:nvSpPr>
@@ -26108,7 +26001,7 @@
       </p:sp>
       <p:sp>
         <p:nvSpPr>
-          <p:cNvPr id="195" name="Google Shape;195;p20"/>
+          <p:cNvPr id="193" name="Google Shape;193;p20"/>
           <p:cNvSpPr/>
           <p:nvPr/>
         </p:nvSpPr>
@@ -26167,7 +26060,7 @@
       </p:sp>
       <p:sp>
         <p:nvSpPr>
-          <p:cNvPr id="196" name="Google Shape;196;p20"/>
+          <p:cNvPr id="194" name="Google Shape;194;p20"/>
           <p:cNvSpPr txBox="1"/>
           <p:nvPr/>
         </p:nvSpPr>
@@ -26257,7 +26150,7 @@
       </p:sp>
       <p:sp>
         <p:nvSpPr>
-          <p:cNvPr id="197" name="Google Shape;197;p20"/>
+          <p:cNvPr id="195" name="Google Shape;195;p20"/>
           <p:cNvSpPr txBox="1"/>
           <p:nvPr/>
         </p:nvSpPr>
@@ -26323,7 +26216,7 @@
       </p:sp>
       <p:sp>
         <p:nvSpPr>
-          <p:cNvPr id="198" name="Google Shape;198;p20"/>
+          <p:cNvPr id="196" name="Google Shape;196;p20"/>
           <p:cNvSpPr txBox="1"/>
           <p:nvPr/>
         </p:nvSpPr>
@@ -26401,7 +26294,7 @@
       </p:sp>
       <p:sp>
         <p:nvSpPr>
-          <p:cNvPr id="199" name="Google Shape;199;p20"/>
+          <p:cNvPr id="197" name="Google Shape;197;p20"/>
           <p:cNvSpPr txBox="1"/>
           <p:nvPr/>
         </p:nvSpPr>
@@ -26479,7 +26372,7 @@
       </p:sp>
       <p:sp>
         <p:nvSpPr>
-          <p:cNvPr id="200" name="Google Shape;200;p20"/>
+          <p:cNvPr id="198" name="Google Shape;198;p20"/>
           <p:cNvSpPr txBox="1"/>
           <p:nvPr/>
         </p:nvSpPr>
@@ -26581,7 +26474,7 @@
       </p:sp>
       <p:sp>
         <p:nvSpPr>
-          <p:cNvPr id="201" name="Google Shape;201;p20"/>
+          <p:cNvPr id="199" name="Google Shape;199;p20"/>
           <p:cNvSpPr txBox="1"/>
           <p:nvPr/>
         </p:nvSpPr>
@@ -26647,7 +26540,7 @@
       </p:sp>
       <p:sp>
         <p:nvSpPr>
-          <p:cNvPr id="202" name="Google Shape;202;p20"/>
+          <p:cNvPr id="200" name="Google Shape;200;p20"/>
           <p:cNvSpPr txBox="1"/>
           <p:nvPr/>
         </p:nvSpPr>
@@ -26713,7 +26606,7 @@
       </p:sp>
       <p:pic>
         <p:nvPicPr>
-          <p:cNvPr id="203" name="Google Shape;203;p20" title="voce.png"/>
+          <p:cNvPr id="201" name="Google Shape;201;p20" title="speech.png"/>
           <p:cNvPicPr preferRelativeResize="0"/>
           <p:nvPr/>
         </p:nvPicPr>
@@ -26727,8 +26620,8 @@
         </p:blipFill>
         <p:spPr>
           <a:xfrm>
-            <a:off x="322725" y="2103650"/>
-            <a:ext cx="11537650" cy="4249526"/>
+            <a:off x="771525" y="2091750"/>
+            <a:ext cx="11031300" cy="4097125"/>
           </a:xfrm>
           <a:prstGeom prst="rect">
             <a:avLst/>
@@ -26759,7 +26652,7 @@
     </p:bg>
     <p:spTree>
       <p:nvGrpSpPr>
-        <p:cNvPr id="207" name="Shape 207"/>
+        <p:cNvPr id="205" name="Shape 205"/>
         <p:cNvGrpSpPr/>
         <p:nvPr/>
       </p:nvGrpSpPr>
@@ -26773,7 +26666,7 @@
       </p:grpSpPr>
       <p:pic>
         <p:nvPicPr>
-          <p:cNvPr descr="image.png" id="208" name="Google Shape;208;p21"/>
+          <p:cNvPr descr="image.png" id="206" name="Google Shape;206;p21"/>
           <p:cNvPicPr preferRelativeResize="0"/>
           <p:nvPr/>
         </p:nvPicPr>
@@ -26800,7 +26693,7 @@
       </p:pic>
       <p:sp>
         <p:nvSpPr>
-          <p:cNvPr id="209" name="Google Shape;209;p21"/>
+          <p:cNvPr id="207" name="Google Shape;207;p21"/>
           <p:cNvSpPr txBox="1"/>
           <p:nvPr/>
         </p:nvSpPr>
@@ -26866,7 +26759,7 @@
       </p:sp>
       <p:sp>
         <p:nvSpPr>
-          <p:cNvPr id="210" name="Google Shape;210;p21"/>
+          <p:cNvPr id="208" name="Google Shape;208;p21"/>
           <p:cNvSpPr/>
           <p:nvPr/>
         </p:nvSpPr>
@@ -26925,7 +26818,7 @@
       </p:sp>
       <p:sp>
         <p:nvSpPr>
-          <p:cNvPr id="211" name="Google Shape;211;p21"/>
+          <p:cNvPr id="209" name="Google Shape;209;p21"/>
           <p:cNvSpPr txBox="1"/>
           <p:nvPr/>
         </p:nvSpPr>
@@ -27015,7 +26908,7 @@
       </p:sp>
       <p:sp>
         <p:nvSpPr>
-          <p:cNvPr id="212" name="Google Shape;212;p21"/>
+          <p:cNvPr id="210" name="Google Shape;210;p21"/>
           <p:cNvSpPr txBox="1"/>
           <p:nvPr/>
         </p:nvSpPr>
@@ -27081,7 +26974,7 @@
       </p:sp>
       <p:sp>
         <p:nvSpPr>
-          <p:cNvPr id="213" name="Google Shape;213;p21"/>
+          <p:cNvPr id="211" name="Google Shape;211;p21"/>
           <p:cNvSpPr txBox="1"/>
           <p:nvPr/>
         </p:nvSpPr>
@@ -27183,7 +27076,7 @@
       </p:sp>
       <p:sp>
         <p:nvSpPr>
-          <p:cNvPr id="214" name="Google Shape;214;p21"/>
+          <p:cNvPr id="212" name="Google Shape;212;p21"/>
           <p:cNvSpPr txBox="1"/>
           <p:nvPr/>
         </p:nvSpPr>
@@ -27297,7 +27190,7 @@
       </p:sp>
       <p:sp>
         <p:nvSpPr>
-          <p:cNvPr id="215" name="Google Shape;215;p21"/>
+          <p:cNvPr id="213" name="Google Shape;213;p21"/>
           <p:cNvSpPr txBox="1"/>
           <p:nvPr/>
         </p:nvSpPr>
@@ -27399,7 +27292,7 @@
       </p:sp>
       <p:sp>
         <p:nvSpPr>
-          <p:cNvPr id="216" name="Google Shape;216;p21"/>
+          <p:cNvPr id="214" name="Google Shape;214;p21"/>
           <p:cNvSpPr txBox="1"/>
           <p:nvPr/>
         </p:nvSpPr>
@@ -27465,7 +27358,7 @@
       </p:sp>
       <p:sp>
         <p:nvSpPr>
-          <p:cNvPr id="217" name="Google Shape;217;p21"/>
+          <p:cNvPr id="215" name="Google Shape;215;p21"/>
           <p:cNvSpPr txBox="1"/>
           <p:nvPr/>
         </p:nvSpPr>
@@ -27531,7 +27424,7 @@
       </p:sp>
       <p:pic>
         <p:nvPicPr>
-          <p:cNvPr id="218" name="Google Shape;218;p21" title="EnergiVolume.png"/>
+          <p:cNvPr id="216" name="Google Shape;216;p21" title="energyloyd.png"/>
           <p:cNvPicPr preferRelativeResize="0"/>
           <p:nvPr/>
         </p:nvPicPr>
@@ -27545,8 +27438,8 @@
         </p:blipFill>
         <p:spPr>
           <a:xfrm>
-            <a:off x="771525" y="2156200"/>
-            <a:ext cx="11031374" cy="4187450"/>
+            <a:off x="771525" y="2183950"/>
+            <a:ext cx="11031374" cy="4007300"/>
           </a:xfrm>
           <a:prstGeom prst="rect">
             <a:avLst/>
